--- a/사용자매뉴얼/생성본/KB사규관리시스템_사용자매뉴얼_초안.pptx
+++ b/사용자매뉴얼/생성본/KB사규관리시스템_사용자매뉴얼_초안.pptx
@@ -3777,7 +3777,7 @@
       </p:sp>
       <p:pic>
         <p:nvPicPr>
-          <p:cNvPr id="8" name="Picture 7" descr="02.png"/>
+          <p:cNvPr id="8" name="Picture 7" descr="03.png"/>
           <p:cNvPicPr>
             <a:picLocks noChangeAspect="1"/>
           </p:cNvPicPr>
@@ -4949,7 +4949,7 @@
                 <a:latin typeface="맑은 고딕"/>
                 <a:ea typeface="맑은 고딕"/>
               </a:rPr>
-              <a:t>  (확인 필요)</a:t>
+              <a:t/>
             </a:r>
           </a:p>
         </p:txBody>
@@ -7263,7 +7263,7 @@
                 <a:latin typeface="맑은 고딕"/>
                 <a:ea typeface="맑은 고딕"/>
               </a:rPr>
-              <a:t>찾는 사규의 이름을 모를 때, 좌측 분류 트리로 주제(편)별로 사규를 찾습니다.</a:t>
+              <a:t>좌측 분류 트리에서 사규를 단계적으로 찾는 화면입니다. 분류는 편(編) → 사규 → 별표·서식 3단 구조로, 편을 펼쳐 사규를 고르고 [+]가 있는 사규는 딸린 별표·서식까지 펼쳐 볼 수 있습니다.</a:t>
             </a:r>
           </a:p>
         </p:txBody>
@@ -7433,7 +7433,7 @@
                 <a:latin typeface="맑은 고딕"/>
                 <a:ea typeface="맑은 고딕"/>
               </a:rPr>
-              <a:t>편 선택: 찾는 주제의 편 확인 (예: 인사 → 6편 인사·복지)</a:t>
+              <a:t>편 펼치기: 편(예: 8편 IT·정보보호) 클릭 → 사규가 번호순으로 펼쳐짐 (재클릭 시 접힘)</a:t>
             </a:r>
           </a:p>
         </p:txBody>
@@ -7446,7 +7446,7 @@
         </p:nvSpPr>
         <p:spPr>
           <a:xfrm>
-            <a:off x="7360920" y="3785616"/>
+            <a:off x="7360920" y="3968496"/>
             <a:ext cx="292608" cy="292608"/>
           </a:xfrm>
           <a:prstGeom prst="ellipse">
@@ -7500,7 +7500,7 @@
         </p:nvSpPr>
         <p:spPr>
           <a:xfrm>
-            <a:off x="7772400" y="3730752"/>
+            <a:off x="7772400" y="3913632"/>
             <a:ext cx="4023359" cy="640080"/>
           </a:xfrm>
           <a:prstGeom prst="rect">
@@ -7523,7 +7523,7 @@
                 <a:latin typeface="맑은 고딕"/>
                 <a:ea typeface="맑은 고딕"/>
               </a:rPr>
-              <a:t>펼치기(∨): 편 오른쪽 ∨ 클릭 시 하위 사규 목록 표시</a:t>
+              <a:t>사규 선택: 사규명(예: 1. 전산업무규정) 클릭 → 본문(상세) 화면 이동</a:t>
             </a:r>
           </a:p>
         </p:txBody>
@@ -7536,7 +7536,7 @@
         </p:nvSpPr>
         <p:spPr>
           <a:xfrm>
-            <a:off x="7360920" y="4279392"/>
+            <a:off x="7360920" y="4462272"/>
             <a:ext cx="292608" cy="292608"/>
           </a:xfrm>
           <a:prstGeom prst="ellipse">
@@ -7590,7 +7590,7 @@
         </p:nvSpPr>
         <p:spPr>
           <a:xfrm>
-            <a:off x="7772400" y="4224528"/>
+            <a:off x="7772400" y="4407408"/>
             <a:ext cx="4023359" cy="640080"/>
           </a:xfrm>
           <a:prstGeom prst="rect">
@@ -7613,7 +7613,7 @@
                 <a:latin typeface="맑은 고딕"/>
                 <a:ea typeface="맑은 고딕"/>
               </a:rPr>
-              <a:t>사규 선택: 사규명 클릭 → 상세(본문) 화면 이동</a:t>
+              <a:t>별표·서식 펼치기: 사규 옆 [+] 클릭 → 딸린 별표·서식 펼침 ([-]는 펼쳐진 상태)</a:t>
             </a:r>
           </a:p>
         </p:txBody>
@@ -7626,7 +7626,7 @@
         </p:nvSpPr>
         <p:spPr>
           <a:xfrm>
-            <a:off x="7360920" y="4773168"/>
+            <a:off x="7360920" y="4956048"/>
             <a:ext cx="292608" cy="292608"/>
           </a:xfrm>
           <a:prstGeom prst="ellipse">
@@ -7680,7 +7680,7 @@
         </p:nvSpPr>
         <p:spPr>
           <a:xfrm>
-            <a:off x="7772400" y="4718304"/>
+            <a:off x="7772400" y="4901184"/>
             <a:ext cx="4023359" cy="640080"/>
           </a:xfrm>
           <a:prstGeom prst="rect">
@@ -7703,32 +7703,30 @@
                 <a:latin typeface="맑은 고딕"/>
                 <a:ea typeface="맑은 고딕"/>
               </a:rPr>
-              <a:t>사이드바 접기(&lt;): 화면을 넓게 보려면 좌측 영역 접기</a:t>
-            </a:r>
-          </a:p>
-        </p:txBody>
-      </p:sp>
-      <p:sp>
-        <p:nvSpPr>
-          <p:cNvPr id="23" name="Rectangle 22"/>
+              <a:t>별표·서식 열람: 파란색 [별표] 항목 클릭 → 해당 별표/서식 확인</a:t>
+            </a:r>
+          </a:p>
+        </p:txBody>
+      </p:sp>
+      <p:sp>
+        <p:nvSpPr>
+          <p:cNvPr id="23" name="Oval 22"/>
           <p:cNvSpPr/>
           <p:nvPr/>
         </p:nvSpPr>
         <p:spPr>
           <a:xfrm>
-            <a:off x="7360920" y="5989320"/>
-            <a:ext cx="4434840" cy="384048"/>
-          </a:xfrm>
-          <a:prstGeom prst="rect">
+            <a:off x="7360920" y="5449824"/>
+            <a:ext cx="292608" cy="292608"/>
+          </a:xfrm>
+          <a:prstGeom prst="ellipse">
             <a:avLst/>
           </a:prstGeom>
           <a:solidFill>
-            <a:srgbClr val="FDF1E6"/>
+            <a:srgbClr val="FFB800"/>
           </a:solidFill>
-          <a:ln w="9525">
-            <a:solidFill>
-              <a:srgbClr val="D9532C"/>
-            </a:solidFill>
+          <a:ln>
+            <a:noFill/>
           </a:ln>
           <a:effectLst/>
         </p:spPr>
@@ -7747,10 +7745,20 @@
           </a:fontRef>
         </p:style>
         <p:txBody>
-          <a:bodyPr rtlCol="0" anchor="ctr"/>
+          <a:bodyPr rtlCol="0" anchor="ctr" lIns="0" rIns="0" tIns="0" bIns="0" wrap="none"/>
           <a:lstStyle/>
           <a:p>
             <a:pPr algn="ctr"/>
+            <a:r>
+              <a:rPr sz="1100" b="1">
+                <a:solidFill>
+                  <a:srgbClr val="333333"/>
+                </a:solidFill>
+                <a:latin typeface="맑은 고딕"/>
+                <a:ea typeface="맑은 고딕"/>
+              </a:rPr>
+              <a:t>5</a:t>
+            </a:r>
           </a:p>
         </p:txBody>
       </p:sp>
@@ -7762,8 +7770,8 @@
         </p:nvSpPr>
         <p:spPr>
           <a:xfrm>
-            <a:off x="7470648" y="5989320"/>
-            <a:ext cx="4215383" cy="384048"/>
+            <a:off x="7772400" y="5394960"/>
+            <a:ext cx="4023359" cy="640080"/>
           </a:xfrm>
           <a:prstGeom prst="rect">
             <a:avLst/>
@@ -7771,31 +7779,21 @@
           <a:noFill/>
         </p:spPr>
         <p:txBody>
-          <a:bodyPr wrap="square" anchor="ctr" lIns="0" rIns="0" tIns="0" bIns="0">
+          <a:bodyPr wrap="square" anchor="t" lIns="0" rIns="0" tIns="0" bIns="0">
             <a:spAutoFit/>
           </a:bodyPr>
           <a:lstStyle/>
           <a:p>
             <a:pPr algn="l"/>
             <a:r>
-              <a:rPr sz="950" b="1">
-                <a:solidFill>
-                  <a:srgbClr val="D9532C"/>
-                </a:solidFill>
-                <a:latin typeface="맑은 고딕"/>
-                <a:ea typeface="맑은 고딕"/>
-              </a:rPr>
-              <a:t>[확인 필요] </a:t>
-            </a:r>
-            <a:r>
-              <a:rPr sz="950" b="0">
-                <a:solidFill>
-                  <a:srgbClr val="D9532C"/>
-                </a:solidFill>
-                <a:latin typeface="맑은 고딕"/>
-                <a:ea typeface="맑은 고딕"/>
-              </a:rPr>
-              <a:t>펼친 하위 목록 캡처 매칭 예정</a:t>
+              <a:rPr sz="1050" b="0">
+                <a:solidFill>
+                  <a:srgbClr val="333333"/>
+                </a:solidFill>
+                <a:latin typeface="맑은 고딕"/>
+                <a:ea typeface="맑은 고딕"/>
+              </a:rPr>
+              <a:t>더 찾기: 항목이 많으면 좌측 영역을 스크롤해 다른 사규 탐색</a:t>
             </a:r>
           </a:p>
         </p:txBody>
@@ -8160,7 +8158,7 @@
       </p:sp>
       <p:pic>
         <p:nvPicPr>
-          <p:cNvPr id="8" name="Picture 7" descr="02.png"/>
+          <p:cNvPr id="8" name="Picture 7" descr="03.png"/>
           <p:cNvPicPr>
             <a:picLocks noChangeAspect="1"/>
           </p:cNvPicPr>
@@ -10408,7 +10406,7 @@
       </p:sp>
       <p:pic>
         <p:nvPicPr>
-          <p:cNvPr id="8" name="Picture 7" descr="02.png"/>
+          <p:cNvPr id="8" name="Picture 7" descr="03.png"/>
           <p:cNvPicPr>
             <a:picLocks noChangeAspect="1"/>
           </p:cNvPicPr>
@@ -12656,7 +12654,7 @@
       </p:sp>
       <p:pic>
         <p:nvPicPr>
-          <p:cNvPr id="8" name="Picture 7" descr="02.png"/>
+          <p:cNvPr id="8" name="Picture 7" descr="03.png"/>
           <p:cNvPicPr>
             <a:picLocks noChangeAspect="1"/>
           </p:cNvPicPr>
